--- a/neerlandais1/powerpoints/Module_26_Hoeveel_kost_het.pptx
+++ b/neerlandais1/powerpoints/Module_26_Hoeveel_kost_het.pptx
@@ -133,18 +133,18 @@
   <p:extLst>
     <p:ext uri="{521415D9-36F7-43E2-AB2F-B90AF26B5E84}">
       <p14:sectionLst xmlns:p14="http://schemas.microsoft.com/office/powerpoint/2010/main">
-        <p14:section name="Ouverture" id="{6111345f-7205-d175-540d-a2540afcc95a}">
+        <p14:section name="Ouverture" id="{d8cb1284-e527-0fad-e55c-39d41f484f5b}">
           <p14:sldIdLst>
             <p14:sldId id="256"/>
           </p14:sldIdLst>
         </p14:section>
-        <p14:section name="Découvrir" id="{6528ca90-0cdc-98cf-e250-0d2374677a13}">
+        <p14:section name="Découvrir" id="{bb5ab6fc-d60e-45f6-24b9-1545e51286cf}">
           <p14:sldIdLst>
             <p14:sldId id="257"/>
             <p14:sldId id="258"/>
           </p14:sldIdLst>
         </p14:section>
-        <p14:section name="Comprendre" id="{7f4b5085-682a-a497-9cbc-1d420be0985a}">
+        <p14:section name="Comprendre" id="{fbdf8a54-cae8-6f7b-74a4-b3f83460e554}">
           <p14:sldIdLst>
             <p14:sldId id="259"/>
             <p14:sldId id="260"/>
@@ -158,7 +158,7 @@
             <p14:sldId id="268"/>
           </p14:sldIdLst>
         </p14:section>
-        <p14:section name="JIJ NU ! — Oefeningen" id="{8b3f1805-ae27-8192-20f2-904f47524c88}">
+        <p14:section name="JIJ NU ! — Oefeningen" id="{f83893dc-d236-9f99-5670-e4865c76053e}">
           <p14:sldIdLst>
             <p14:sldId id="269"/>
             <p14:sldId id="270"/>
@@ -175,7 +175,7 @@
             <p14:sldId id="281"/>
           </p14:sldIdLst>
         </p14:section>
-        <p14:section name="Clôture" id="{f91ec791-749a-4ff0-05e0-005606e30b9b}">
+        <p14:section name="Clôture" id="{8ba198b4-8289-261c-69ae-26723618e7dd}">
           <p14:sldIdLst>
             <p14:sldId id="282"/>
           </p14:sldIdLst>
@@ -3806,7 +3806,7 @@
                   <a:srgbClr val="FFFFFF"/>
                 </a:solidFill>
               </a:rPr>
-              <a:t>MODULE 26 / 29</a:t>
+              <a:t>MODULE 26 / 32</a:t>
             </a:r>
             <a:endParaRPr lang="en-US" sz="1400" dirty="0"/>
           </a:p>

--- a/neerlandais1/powerpoints/Module_26_Hoeveel_kost_het.pptx
+++ b/neerlandais1/powerpoints/Module_26_Hoeveel_kost_het.pptx
@@ -133,18 +133,18 @@
   <p:extLst>
     <p:ext uri="{521415D9-36F7-43E2-AB2F-B90AF26B5E84}">
       <p14:sectionLst xmlns:p14="http://schemas.microsoft.com/office/powerpoint/2010/main">
-        <p14:section name="Ouverture" id="{d8cb1284-e527-0fad-e55c-39d41f484f5b}">
+        <p14:section name="Ouverture" id="{7f43444a-1875-d1b0-6fde-7170ca02d34d}">
           <p14:sldIdLst>
             <p14:sldId id="256"/>
           </p14:sldIdLst>
         </p14:section>
-        <p14:section name="Découvrir" id="{bb5ab6fc-d60e-45f6-24b9-1545e51286cf}">
+        <p14:section name="Découvrir" id="{473c28e3-e24d-ec1b-675f-4fd48be8106c}">
           <p14:sldIdLst>
             <p14:sldId id="257"/>
             <p14:sldId id="258"/>
           </p14:sldIdLst>
         </p14:section>
-        <p14:section name="Comprendre" id="{fbdf8a54-cae8-6f7b-74a4-b3f83460e554}">
+        <p14:section name="Comprendre" id="{fa7918e7-aec7-1e90-fc0e-25fe060219ec}">
           <p14:sldIdLst>
             <p14:sldId id="259"/>
             <p14:sldId id="260"/>
@@ -158,7 +158,7 @@
             <p14:sldId id="268"/>
           </p14:sldIdLst>
         </p14:section>
-        <p14:section name="JIJ NU ! — Oefeningen" id="{f83893dc-d236-9f99-5670-e4865c76053e}">
+        <p14:section name="JIJ NU ! — Oefeningen" id="{c430f82b-40ed-fcf1-dc75-8d45a80f3d85}">
           <p14:sldIdLst>
             <p14:sldId id="269"/>
             <p14:sldId id="270"/>
@@ -175,7 +175,7 @@
             <p14:sldId id="281"/>
           </p14:sldIdLst>
         </p14:section>
-        <p14:section name="Clôture" id="{8ba198b4-8289-261c-69ae-26723618e7dd}">
+        <p14:section name="Clôture" id="{5f0a1d2a-93b4-0691-965e-853b138da4f9}">
           <p14:sldIdLst>
             <p14:sldId id="282"/>
           </p14:sldIdLst>

--- a/neerlandais1/powerpoints/Module_26_Hoeveel_kost_het.pptx
+++ b/neerlandais1/powerpoints/Module_26_Hoeveel_kost_het.pptx
@@ -133,18 +133,18 @@
   <p:extLst>
     <p:ext uri="{521415D9-36F7-43E2-AB2F-B90AF26B5E84}">
       <p14:sectionLst xmlns:p14="http://schemas.microsoft.com/office/powerpoint/2010/main">
-        <p14:section name="Ouverture" id="{7f43444a-1875-d1b0-6fde-7170ca02d34d}">
+        <p14:section name="Ouverture" id="{80c6a867-d7ff-2330-6e57-97f9d81f8186}">
           <p14:sldIdLst>
             <p14:sldId id="256"/>
           </p14:sldIdLst>
         </p14:section>
-        <p14:section name="Découvrir" id="{473c28e3-e24d-ec1b-675f-4fd48be8106c}">
+        <p14:section name="Découvrir" id="{5e77053d-5619-b398-4d8e-422c9933b024}">
           <p14:sldIdLst>
             <p14:sldId id="257"/>
             <p14:sldId id="258"/>
           </p14:sldIdLst>
         </p14:section>
-        <p14:section name="Comprendre" id="{fa7918e7-aec7-1e90-fc0e-25fe060219ec}">
+        <p14:section name="Comprendre" id="{cf0deb37-cdd2-b5de-63bb-89625a2353d5}">
           <p14:sldIdLst>
             <p14:sldId id="259"/>
             <p14:sldId id="260"/>
@@ -158,7 +158,7 @@
             <p14:sldId id="268"/>
           </p14:sldIdLst>
         </p14:section>
-        <p14:section name="JIJ NU ! — Oefeningen" id="{c430f82b-40ed-fcf1-dc75-8d45a80f3d85}">
+        <p14:section name="JIJ NU ! — Oefeningen" id="{2deef1c9-530e-c4fb-f5c6-5e9cf56b6907}">
           <p14:sldIdLst>
             <p14:sldId id="269"/>
             <p14:sldId id="270"/>
@@ -175,7 +175,7 @@
             <p14:sldId id="281"/>
           </p14:sldIdLst>
         </p14:section>
-        <p14:section name="Clôture" id="{5f0a1d2a-93b4-0691-965e-853b138da4f9}">
+        <p14:section name="Clôture" id="{5f0e783c-ad33-f35e-1c4c-038440e41174}">
           <p14:sldIdLst>
             <p14:sldId id="282"/>
           </p14:sldIdLst>

--- a/neerlandais1/powerpoints/Module_26_Hoeveel_kost_het.pptx
+++ b/neerlandais1/powerpoints/Module_26_Hoeveel_kost_het.pptx
@@ -133,18 +133,18 @@
   <p:extLst>
     <p:ext uri="{521415D9-36F7-43E2-AB2F-B90AF26B5E84}">
       <p14:sectionLst xmlns:p14="http://schemas.microsoft.com/office/powerpoint/2010/main">
-        <p14:section name="Ouverture" id="{80c6a867-d7ff-2330-6e57-97f9d81f8186}">
+        <p14:section name="Ouverture" id="{d331d421-5f2c-3bfe-01c9-47ee92650cfb}">
           <p14:sldIdLst>
             <p14:sldId id="256"/>
           </p14:sldIdLst>
         </p14:section>
-        <p14:section name="Découvrir" id="{5e77053d-5619-b398-4d8e-422c9933b024}">
+        <p14:section name="Découvrir" id="{09bd81b4-dd24-4bb0-50c0-61d235d25bdd}">
           <p14:sldIdLst>
             <p14:sldId id="257"/>
             <p14:sldId id="258"/>
           </p14:sldIdLst>
         </p14:section>
-        <p14:section name="Comprendre" id="{cf0deb37-cdd2-b5de-63bb-89625a2353d5}">
+        <p14:section name="Comprendre" id="{2b1d13e5-3265-4e86-00f5-5f3eda11df24}">
           <p14:sldIdLst>
             <p14:sldId id="259"/>
             <p14:sldId id="260"/>
@@ -158,7 +158,7 @@
             <p14:sldId id="268"/>
           </p14:sldIdLst>
         </p14:section>
-        <p14:section name="JIJ NU ! — Oefeningen" id="{2deef1c9-530e-c4fb-f5c6-5e9cf56b6907}">
+        <p14:section name="JIJ NU ! — Oefeningen" id="{88b22bef-95b2-d4a2-c56d-81fdf8c8dfca}">
           <p14:sldIdLst>
             <p14:sldId id="269"/>
             <p14:sldId id="270"/>
@@ -175,7 +175,7 @@
             <p14:sldId id="281"/>
           </p14:sldIdLst>
         </p14:section>
-        <p14:section name="Clôture" id="{5f0e783c-ad33-f35e-1c4c-038440e41174}">
+        <p14:section name="Clôture" id="{ee6afd93-12b7-0eb6-ca59-cd50bd85e1ae}">
           <p14:sldIdLst>
             <p14:sldId id="282"/>
           </p14:sldIdLst>

--- a/neerlandais1/powerpoints/Module_26_Hoeveel_kost_het.pptx
+++ b/neerlandais1/powerpoints/Module_26_Hoeveel_kost_het.pptx
@@ -133,18 +133,18 @@
   <p:extLst>
     <p:ext uri="{521415D9-36F7-43E2-AB2F-B90AF26B5E84}">
       <p14:sectionLst xmlns:p14="http://schemas.microsoft.com/office/powerpoint/2010/main">
-        <p14:section name="Ouverture" id="{d331d421-5f2c-3bfe-01c9-47ee92650cfb}">
+        <p14:section name="Ouverture" id="{d1585955-1afb-b280-e26a-de08dbab218b}">
           <p14:sldIdLst>
             <p14:sldId id="256"/>
           </p14:sldIdLst>
         </p14:section>
-        <p14:section name="Découvrir" id="{09bd81b4-dd24-4bb0-50c0-61d235d25bdd}">
+        <p14:section name="Découvrir" id="{e7c201ca-34c5-a975-8080-258c52ce1817}">
           <p14:sldIdLst>
             <p14:sldId id="257"/>
             <p14:sldId id="258"/>
           </p14:sldIdLst>
         </p14:section>
-        <p14:section name="Comprendre" id="{2b1d13e5-3265-4e86-00f5-5f3eda11df24}">
+        <p14:section name="Comprendre" id="{e9965a3d-264a-381a-b184-b27455ed5965}">
           <p14:sldIdLst>
             <p14:sldId id="259"/>
             <p14:sldId id="260"/>
@@ -158,7 +158,7 @@
             <p14:sldId id="268"/>
           </p14:sldIdLst>
         </p14:section>
-        <p14:section name="JIJ NU ! — Oefeningen" id="{88b22bef-95b2-d4a2-c56d-81fdf8c8dfca}">
+        <p14:section name="JIJ NU ! — Oefeningen" id="{38677fb9-6992-c511-88e0-8a7f50fe3b36}">
           <p14:sldIdLst>
             <p14:sldId id="269"/>
             <p14:sldId id="270"/>
@@ -175,7 +175,7 @@
             <p14:sldId id="281"/>
           </p14:sldIdLst>
         </p14:section>
-        <p14:section name="Clôture" id="{ee6afd93-12b7-0eb6-ca59-cd50bd85e1ae}">
+        <p14:section name="Clôture" id="{42841225-0be5-fe7e-0651-c32bca83a4b5}">
           <p14:sldIdLst>
             <p14:sldId id="282"/>
           </p14:sldIdLst>

--- a/neerlandais1/powerpoints/Module_26_Hoeveel_kost_het.pptx
+++ b/neerlandais1/powerpoints/Module_26_Hoeveel_kost_het.pptx
@@ -133,18 +133,18 @@
   <p:extLst>
     <p:ext uri="{521415D9-36F7-43E2-AB2F-B90AF26B5E84}">
       <p14:sectionLst xmlns:p14="http://schemas.microsoft.com/office/powerpoint/2010/main">
-        <p14:section name="Ouverture" id="{d1585955-1afb-b280-e26a-de08dbab218b}">
+        <p14:section name="Ouverture" id="{67aee782-e7e4-5bf6-6ed4-eb177e34838e}">
           <p14:sldIdLst>
             <p14:sldId id="256"/>
           </p14:sldIdLst>
         </p14:section>
-        <p14:section name="Découvrir" id="{e7c201ca-34c5-a975-8080-258c52ce1817}">
+        <p14:section name="Découvrir" id="{ef017fd6-457c-cdca-5a55-3d7dfff6f139}">
           <p14:sldIdLst>
             <p14:sldId id="257"/>
             <p14:sldId id="258"/>
           </p14:sldIdLst>
         </p14:section>
-        <p14:section name="Comprendre" id="{e9965a3d-264a-381a-b184-b27455ed5965}">
+        <p14:section name="Comprendre" id="{4b342a41-49b6-75f6-6415-d2cc3e48ed16}">
           <p14:sldIdLst>
             <p14:sldId id="259"/>
             <p14:sldId id="260"/>
@@ -158,7 +158,7 @@
             <p14:sldId id="268"/>
           </p14:sldIdLst>
         </p14:section>
-        <p14:section name="JIJ NU ! — Oefeningen" id="{38677fb9-6992-c511-88e0-8a7f50fe3b36}">
+        <p14:section name="JIJ NU ! — Oefeningen" id="{ae7fbdfb-1051-05dd-65e4-61591286c716}">
           <p14:sldIdLst>
             <p14:sldId id="269"/>
             <p14:sldId id="270"/>
@@ -175,7 +175,7 @@
             <p14:sldId id="281"/>
           </p14:sldIdLst>
         </p14:section>
-        <p14:section name="Clôture" id="{42841225-0be5-fe7e-0651-c32bca83a4b5}">
+        <p14:section name="Clôture" id="{58c089a2-b9e5-5878-790c-e01126f4fad1}">
           <p14:sldIdLst>
             <p14:sldId id="282"/>
           </p14:sldIdLst>

--- a/neerlandais1/powerpoints/Module_26_Hoeveel_kost_het.pptx
+++ b/neerlandais1/powerpoints/Module_26_Hoeveel_kost_het.pptx
@@ -133,18 +133,18 @@
   <p:extLst>
     <p:ext uri="{521415D9-36F7-43E2-AB2F-B90AF26B5E84}">
       <p14:sectionLst xmlns:p14="http://schemas.microsoft.com/office/powerpoint/2010/main">
-        <p14:section name="Ouverture" id="{67aee782-e7e4-5bf6-6ed4-eb177e34838e}">
+        <p14:section name="Ouverture" id="{7548c1be-3739-b655-5fdb-bad6f92a296c}">
           <p14:sldIdLst>
             <p14:sldId id="256"/>
           </p14:sldIdLst>
         </p14:section>
-        <p14:section name="Découvrir" id="{ef017fd6-457c-cdca-5a55-3d7dfff6f139}">
+        <p14:section name="Découvrir" id="{8a10848b-9297-2ecf-e8e2-2e34d94892a5}">
           <p14:sldIdLst>
             <p14:sldId id="257"/>
             <p14:sldId id="258"/>
           </p14:sldIdLst>
         </p14:section>
-        <p14:section name="Comprendre" id="{4b342a41-49b6-75f6-6415-d2cc3e48ed16}">
+        <p14:section name="Comprendre" id="{274a6fb6-cf55-d037-2c07-d19b00d6189f}">
           <p14:sldIdLst>
             <p14:sldId id="259"/>
             <p14:sldId id="260"/>
@@ -158,7 +158,7 @@
             <p14:sldId id="268"/>
           </p14:sldIdLst>
         </p14:section>
-        <p14:section name="JIJ NU ! — Oefeningen" id="{ae7fbdfb-1051-05dd-65e4-61591286c716}">
+        <p14:section name="JIJ NU ! — Oefeningen" id="{953a0238-021d-8410-eb22-e8277b7ba3b3}">
           <p14:sldIdLst>
             <p14:sldId id="269"/>
             <p14:sldId id="270"/>
@@ -175,7 +175,7 @@
             <p14:sldId id="281"/>
           </p14:sldIdLst>
         </p14:section>
-        <p14:section name="Clôture" id="{58c089a2-b9e5-5878-790c-e01126f4fad1}">
+        <p14:section name="Clôture" id="{f4bc017e-e43a-da24-ecee-7976698bd829}">
           <p14:sldIdLst>
             <p14:sldId id="282"/>
           </p14:sldIdLst>

--- a/neerlandais1/powerpoints/Module_26_Hoeveel_kost_het.pptx
+++ b/neerlandais1/powerpoints/Module_26_Hoeveel_kost_het.pptx
@@ -133,18 +133,18 @@
   <p:extLst>
     <p:ext uri="{521415D9-36F7-43E2-AB2F-B90AF26B5E84}">
       <p14:sectionLst xmlns:p14="http://schemas.microsoft.com/office/powerpoint/2010/main">
-        <p14:section name="Ouverture" id="{7548c1be-3739-b655-5fdb-bad6f92a296c}">
+        <p14:section name="Ouverture" id="{e3052556-c5a3-084d-fea9-57a6419d8a95}">
           <p14:sldIdLst>
             <p14:sldId id="256"/>
           </p14:sldIdLst>
         </p14:section>
-        <p14:section name="Découvrir" id="{8a10848b-9297-2ecf-e8e2-2e34d94892a5}">
+        <p14:section name="Découvrir" id="{9b1a9fab-96a8-a3da-0333-1a2c9275ddb2}">
           <p14:sldIdLst>
             <p14:sldId id="257"/>
             <p14:sldId id="258"/>
           </p14:sldIdLst>
         </p14:section>
-        <p14:section name="Comprendre" id="{274a6fb6-cf55-d037-2c07-d19b00d6189f}">
+        <p14:section name="Comprendre" id="{0c772951-a2a6-294f-017f-492b186b79aa}">
           <p14:sldIdLst>
             <p14:sldId id="259"/>
             <p14:sldId id="260"/>
@@ -158,7 +158,7 @@
             <p14:sldId id="268"/>
           </p14:sldIdLst>
         </p14:section>
-        <p14:section name="JIJ NU ! — Oefeningen" id="{953a0238-021d-8410-eb22-e8277b7ba3b3}">
+        <p14:section name="JIJ NU ! — Oefeningen" id="{243ec19f-00e1-9b3a-b9db-dd0f8051ffeb}">
           <p14:sldIdLst>
             <p14:sldId id="269"/>
             <p14:sldId id="270"/>
@@ -175,7 +175,7 @@
             <p14:sldId id="281"/>
           </p14:sldIdLst>
         </p14:section>
-        <p14:section name="Clôture" id="{f4bc017e-e43a-da24-ecee-7976698bd829}">
+        <p14:section name="Clôture" id="{c5376ec7-c240-4604-9ea1-368761ad09ad}">
           <p14:sldIdLst>
             <p14:sldId id="282"/>
           </p14:sldIdLst>

--- a/neerlandais1/powerpoints/Module_26_Hoeveel_kost_het.pptx
+++ b/neerlandais1/powerpoints/Module_26_Hoeveel_kost_het.pptx
@@ -133,18 +133,18 @@
   <p:extLst>
     <p:ext uri="{521415D9-36F7-43E2-AB2F-B90AF26B5E84}">
       <p14:sectionLst xmlns:p14="http://schemas.microsoft.com/office/powerpoint/2010/main">
-        <p14:section name="Ouverture" id="{e3052556-c5a3-084d-fea9-57a6419d8a95}">
+        <p14:section name="Ouverture" id="{1e6c9328-cf7b-5a21-5701-5a0eae8422d0}">
           <p14:sldIdLst>
             <p14:sldId id="256"/>
           </p14:sldIdLst>
         </p14:section>
-        <p14:section name="Découvrir" id="{9b1a9fab-96a8-a3da-0333-1a2c9275ddb2}">
+        <p14:section name="Découvrir" id="{33ccd183-b916-195e-7d9f-714f959478fc}">
           <p14:sldIdLst>
             <p14:sldId id="257"/>
             <p14:sldId id="258"/>
           </p14:sldIdLst>
         </p14:section>
-        <p14:section name="Comprendre" id="{0c772951-a2a6-294f-017f-492b186b79aa}">
+        <p14:section name="Comprendre" id="{b79edac8-210c-3b43-a4ef-5b3d66c673e1}">
           <p14:sldIdLst>
             <p14:sldId id="259"/>
             <p14:sldId id="260"/>
@@ -158,7 +158,7 @@
             <p14:sldId id="268"/>
           </p14:sldIdLst>
         </p14:section>
-        <p14:section name="JIJ NU ! — Oefeningen" id="{243ec19f-00e1-9b3a-b9db-dd0f8051ffeb}">
+        <p14:section name="JIJ NU ! — Oefeningen" id="{a48a07c6-800b-31df-a06f-6b2f5b1974af}">
           <p14:sldIdLst>
             <p14:sldId id="269"/>
             <p14:sldId id="270"/>
@@ -175,7 +175,7 @@
             <p14:sldId id="281"/>
           </p14:sldIdLst>
         </p14:section>
-        <p14:section name="Clôture" id="{c5376ec7-c240-4604-9ea1-368761ad09ad}">
+        <p14:section name="Clôture" id="{6d528d18-ae5b-6e34-dda7-112b28386cee}">
           <p14:sldIdLst>
             <p14:sldId id="282"/>
           </p14:sldIdLst>
